--- a/slides/ISSW2026_autoATES_workshop_observer.pptx
+++ b/slides/ISSW2026_autoATES_workshop_observer.pptx
@@ -777,7 +777,7 @@
           <a:p>
             <a:r>
               <a:rPr lang="en-US" dirty="0"/>
-              <a:t>Do not start a second live AOI. South Coast is QGIS-only if the extra zip is present.</a:t>
+              <a:t>We will not start a second live AOI. South Coast is QGIS-only if that extra is present.</a:t>
             </a:r>
             <a:endParaRPr lang="en-US" dirty="0"/>
           </a:p>
@@ -953,7 +953,7 @@
           <a:p>
             <a:r>
               <a:rPr lang="en-US" dirty="0"/>
-              <a:t>Typical vs infrequent is the v3.0 design. Do not retune class thresholds live.</a:t>
+              <a:t>Typical vs infrequent is the v3.0 design. Keep the ISSW thresholds for this session.</a:t>
             </a:r>
             <a:endParaRPr lang="en-US" dirty="0"/>
           </a:p>
@@ -1393,7 +1393,7 @@
           <a:p>
             <a:r>
               <a:rPr lang="en-US" dirty="0"/>
-              <a:t>Published v2 sits on the calibration envelope. Do not retune thresholds live.</a:t>
+              <a:t>Published v2 sits on the calibration envelope. Keep the ISSW thresholds for this session.</a:t>
             </a:r>
             <a:endParaRPr lang="en-US" dirty="0"/>
           </a:p>
@@ -2004,7 +2004,7 @@
                 <a:ea typeface="Calibri" pitchFamily="34" charset="-122"/>
                 <a:cs typeface="Calibri" pitchFamily="34" charset="-120"/>
               </a:rPr>
-              <a:t>Follow along on a laptop, or sit and watch. Both tracks are first-class.</a:t>
+              <a:t>You can run the notebooks on a laptop, or follow the same maps on the projector.</a:t>
             </a:r>
             <a:endParaRPr lang="en-US" sz="1600" dirty="0"/>
           </a:p>
@@ -3316,7 +3316,7 @@
                 <a:ea typeface="Calibri" pitchFamily="34" charset="-122"/>
                 <a:cs typeface="Calibri" pitchFamily="34" charset="-120"/>
               </a:rPr>
-              <a:t>Follow along</a:t>
+              <a:t>On a laptop</a:t>
             </a:r>
             <a:endParaRPr lang="en-US" sz="2200" dirty="0"/>
           </a:p>
@@ -3355,7 +3355,7 @@
                 <a:ea typeface="Calibri" pitchFamily="34" charset="-122"/>
                 <a:cs typeface="Calibri" pitchFamily="34" charset="-120"/>
               </a:rPr>
-              <a:t>Run the notebook for the current module. Python 3.11 + QGIS. If a step fails, copy that folder’s outputs_reference and continue.</a:t>
+              <a:t>Run the notebook for the current module (Python 3.11 + QGIS). If a step stalls, copy that folder’s outputs_reference and continue with the group.</a:t>
             </a:r>
             <a:endParaRPr lang="en-US" sz="1600" dirty="0"/>
           </a:p>
@@ -3419,7 +3419,7 @@
                 <a:ea typeface="Calibri" pitchFamily="34" charset="-122"/>
                 <a:cs typeface="Calibri" pitchFamily="34" charset="-120"/>
               </a:rPr>
-              <a:t>Observe</a:t>
+              <a:t>Watching</a:t>
             </a:r>
             <a:endParaRPr lang="en-US" sz="2200" dirty="0"/>
           </a:p>
@@ -3458,7 +3458,7 @@
                 <a:ea typeface="Calibri" pitchFamily="34" charset="-122"/>
                 <a:cs typeface="Calibri" pitchFamily="34" charset="-120"/>
               </a:rPr>
-              <a:t>Same maps on this screen. No laptop required. You leave with the method, the design choices, and where to get the code.</a:t>
+              <a:t>The same maps are on this screen. A laptop is optional. You leave with the method, the design choices, and where to get the code.</a:t>
             </a:r>
             <a:endParaRPr lang="en-US" sz="1600" dirty="0"/>
           </a:p>
@@ -3522,7 +3522,7 @@
                 <a:ea typeface="Calibri" pitchFamily="34" charset="-122"/>
                 <a:cs typeface="Calibri" pitchFamily="34" charset="-120"/>
               </a:rPr>
-              <a:t>Jump ahead</a:t>
+              <a:t>If a step stalls</a:t>
             </a:r>
             <a:endParaRPr lang="en-US" sz="2200" dirty="0"/>
           </a:p>
@@ -3561,7 +3561,7 @@
                 <a:ea typeface="Calibri" pitchFamily="34" charset="-122"/>
                 <a:cs typeface="Calibri" pitchFamily="34" charset="-120"/>
               </a:rPr>
-              <a:t>data/&lt;step&gt;/outputs_reference/ is the recovery path. Helpers will not stop the room for one laptop.</a:t>
+              <a:t>data/&lt;step&gt;/outputs_reference/ lets you stay with the room. Helpers will keep the day moving so the afternoon still fits.</a:t>
             </a:r>
             <a:endParaRPr lang="en-US" sz="1600" dirty="0"/>
           </a:p>
@@ -3600,7 +3600,7 @@
                 <a:ea typeface="Calibri" pitchFamily="34" charset="-122"/>
                 <a:cs typeface="Calibri" pitchFamily="34" charset="-120"/>
               </a:rPr>
-              <a:t>Helpers from 08:15. USB copies at the door. Conference wifi is not a plan.</a:t>
+              <a:t>Helpers from 08:15, with USB copies. Please download the folders before Saturday if you can — conference wifi is often slow.</a:t>
             </a:r>
             <a:endParaRPr lang="en-US" sz="1600" dirty="0"/>
           </a:p>

--- a/slides/ISSW2026_autoATES_workshop_observer.pptx
+++ b/slides/ISSW2026_autoATES_workshop_observer.pptx
@@ -601,7 +601,7 @@
           <a:p>
             <a:r>
               <a:rPr lang="en-US" dirty="0"/>
-              <a:t>Live call is atesCore. Paper hybrid is atesValidation. Class 0 is a safety decision. Discuss next to the expert overlay; do not score as an exam.</a:t>
+              <a:t>This raster is dev8: split votes, then reach floors. Class 0 is a safety decision. Discuss next to the expert overlay; do not score as an exam.</a:t>
             </a:r>
             <a:endParaRPr lang="en-US" dirty="0"/>
           </a:p>
@@ -2122,7 +2122,7 @@
       </p:sp>
       <p:pic>
         <p:nvPicPr>
-          <p:cNvPr id="4" name="Image 0" descr="/home/jmsykes/Documents/Code/issw2026-autoates-workshop/slides/figures/ates_finished.png">    </p:cNvPr>
+          <p:cNvPr id="4" name="Image 0" descr="/home/sykes-sfu/Documents/Code/ATES/issw-workshop/issw2026-autoates-workshop/slides/figures/ates_finished.png">    </p:cNvPr>
           <p:cNvPicPr>
             <a:picLocks noChangeAspect="1"/>
           </p:cNvPicPr>
@@ -4708,7 +4708,7 @@
       </p:sp>
       <p:pic>
         <p:nvPicPr>
-          <p:cNvPr id="4" name="Image 0" descr="/home/jmsykes/Documents/Code/issw2026-autoates-workshop/slides/figures/ates_finished.png">    </p:cNvPr>
+          <p:cNvPr id="4" name="Image 0" descr="/home/sykes-sfu/Documents/Code/ATES/issw-workshop/issw2026-autoates-workshop/slides/figures/ates_finished.png">    </p:cNvPr>
           <p:cNvPicPr>
             <a:picLocks noChangeAspect="1"/>
           </p:cNvPicPr>
@@ -4920,7 +4920,7 @@
       </p:sp>
       <p:pic>
         <p:nvPicPr>
-          <p:cNvPr id="4" name="Image 0" descr="/home/jmsykes/Documents/Code/issw2026-autoates-workshop/slides/figures/elev_hillshade.png">    </p:cNvPr>
+          <p:cNvPr id="4" name="Image 0" descr="/home/sykes-sfu/Documents/Code/ATES/issw-workshop/issw2026-autoates-workshop/slides/figures/elev_hillshade.png">    </p:cNvPr>
           <p:cNvPicPr>
             <a:picLocks noChangeAspect="1"/>
           </p:cNvPicPr>
@@ -5132,7 +5132,7 @@
       </p:sp>
       <p:pic>
         <p:nvPicPr>
-          <p:cNvPr id="4" name="Image 0" descr="/home/jmsykes/Documents/Code/issw2026-autoates-workshop/slides/figures/forest_seasons.png">    </p:cNvPr>
+          <p:cNvPr id="4" name="Image 0" descr="/home/sykes-sfu/Documents/Code/ATES/issw-workshop/issw2026-autoates-workshop/slides/figures/forest_seasons.png">    </p:cNvPr>
           <p:cNvPicPr>
             <a:picLocks noChangeAspect="1"/>
           </p:cNvPicPr>
@@ -5344,7 +5344,7 @@
       </p:sp>
       <p:pic>
         <p:nvPicPr>
-          <p:cNvPr id="4" name="Image 0" descr="/home/jmsykes/Documents/Code/issw2026-autoates-workshop/slides/figures/forest_cover_gap.png">    </p:cNvPr>
+          <p:cNvPr id="4" name="Image 0" descr="/home/sykes-sfu/Documents/Code/ATES/issw-workshop/issw2026-autoates-workshop/slides/figures/forest_cover_gap.png">    </p:cNvPr>
           <p:cNvPicPr>
             <a:picLocks noChangeAspect="1"/>
           </p:cNvPicPr>
@@ -5556,7 +5556,7 @@
       </p:sp>
       <p:pic>
         <p:nvPicPr>
-          <p:cNvPr id="4" name="Image 0" descr="/home/jmsykes/Documents/Code/issw2026-autoates-workshop/slides/figures/pra_two_scenarios.png">    </p:cNvPr>
+          <p:cNvPr id="4" name="Image 0" descr="/home/sykes-sfu/Documents/Code/ATES/issw-workshop/issw2026-autoates-workshop/slides/figures/pra_two_scenarios.png">    </p:cNvPr>
           <p:cNvPicPr>
             <a:picLocks noChangeAspect="1"/>
           </p:cNvPicPr>
@@ -5768,7 +5768,7 @@
       </p:sp>
       <p:pic>
         <p:nvPicPr>
-          <p:cNvPr id="4" name="Image 0" descr="/home/jmsykes/Documents/Code/issw2026-autoates-workshop/slides/figures/runout_two_scenarios.png">    </p:cNvPr>
+          <p:cNvPr id="4" name="Image 0" descr="/home/sykes-sfu/Documents/Code/ATES/issw-workshop/issw2026-autoates-workshop/slides/figures/runout_two_scenarios.png">    </p:cNvPr>
           <p:cNvPicPr>
             <a:picLocks noChangeAspect="1"/>
           </p:cNvPicPr>
